--- a/submissions/FireCal-slides.pptx
+++ b/submissions/FireCal-slides.pptx
@@ -948,7 +948,7 @@
           <a:p>
             <a:r>
               <a:rPr lang="en-US" dirty="0"/>
-              <a:t>Data: NASA FIRMS MODIS Collection 6.1 and VIIRS S-NPP 375 m archives for all 208 countries, and the VIIRS NRT feeds from LANCE. Python, DuckDB and Parquet pipeline; FastAPI server and a static site with an in-browser engine giving identical numbers; a self-renewing watcher keeps live fires current; 64 automated tests.</a:t>
+              <a:t>Data: NASA FIRMS MODIS Collection 6.1 and VIIRS S-NPP 375 m archives for all 208 countries, and the VIIRS NRT feeds from LANCE. Python, DuckDB and Parquet pipeline; FastAPI server and a static site with an in-browser engine giving identical numbers; a self-renewing watcher keeps live fires current; 66 automated tests.</a:t>
             </a:r>
             <a:endParaRPr lang="en-US" dirty="0"/>
           </a:p>

--- a/submissions/FireCal-slides.pptx
+++ b/submissions/FireCal-slides.pptx
@@ -948,7 +948,7 @@
           <a:p>
             <a:r>
               <a:rPr lang="en-US" dirty="0"/>
-              <a:t>Data: NASA FIRMS MODIS Collection 6.1 and VIIRS S-NPP 375 m archives for all 208 countries, and the VIIRS NRT feeds from LANCE. Python, DuckDB and Parquet pipeline; FastAPI server and a static site with an in-browser engine giving identical numbers; a self-renewing watcher keeps live fires current; 66 automated tests.</a:t>
+              <a:t>Data: NASA FIRMS MODIS Collection 6.1 and VIIRS S-NPP 375 m archives for all 208 countries, and the VIIRS NRT feeds from LANCE. Python, DuckDB and Parquet pipeline; FastAPI server and a static site with an in-browser engine giving identical numbers; a self-renewing watcher keeps live fires current; 69 automated tests.</a:t>
             </a:r>
             <a:endParaRPr lang="en-US" dirty="0"/>
           </a:p>

--- a/submissions/FireCal-slides.pptx
+++ b/submissions/FireCal-slides.pptx
@@ -596,7 +596,7 @@
           <a:p>
             <a:r>
               <a:rPr lang="en-US" dirty="0"/>
-              <a:t>MODIS (1 km, 2000 onward) and VIIRS (375 m, 2012 onward) see the same fires differently; VIIRS records 1.9 to 4.0 times more fire cell-days depending on region and month. Raw series jump at the switch, so trends, anomalies and seasons break across 2012. The harmonized record removes the jump.</a:t>
+              <a:t>MODIS (1 km, 2000 onward) and VIIRS (375 m, 2012 onward) see the same fires differently; VIIRS records 1.9 to 4.1 times more fire cell-days depending on the region. Raw series jump at the switch, so trends, anomalies and seasons break across 2012. The harmonized record removes the jump.</a:t>
             </a:r>
             <a:endParaRPr lang="en-US" dirty="0"/>
           </a:p>
@@ -684,7 +684,7 @@
           <a:p>
             <a:r>
               <a:rPr lang="en-US" dirty="0"/>
-              <a:t>Clean: vegetation fires, confidence filters, gas flares masked. Grid: 0.1 degree fire cell-days per sensor. Calibrate: monthly VIIRS/MODIS ratio per area on the 2012+ overlap, shrunk toward the area and worldwide ratios (k_world 2.633 from 208 countries, Lambda 50, lambda 20). Three eras: Terra-only and Terra+Aqua rescaled to VIIRS-equivalent. Validate: leave-one-year-out cross-validation and a Terra-only vs Terra+Aqua check.</a:t>
+              <a:t>Clean: vegetation fires, confidence filters, gas flares masked. Grid: 0.1 degree fire cell-days per sensor. Calibrate: monthly VIIRS/MODIS ratio per area on the 2012+ overlap, shrunk toward the area and worldwide ratios (k_world 2.665 from 208 countries, Lambda 50, lambda 20). Three eras: Terra-only and Terra+Aqua rescaled to VIIRS-equivalent, as are the few days the VIIRS satellite was out. Validate: leave-one-year-out cross-validation and a Terra-only vs Terra+Aqua check.</a:t>
             </a:r>
             <a:endParaRPr lang="en-US" dirty="0"/>
           </a:p>
@@ -772,7 +772,7 @@
           <a:p>
             <a:r>
               <a:rPr lang="en-US" dirty="0"/>
-              <a:t>Errors: DR Congo 1.6%, Nigeria 2.1%, India 2.2%, Australia 3.1%, Ghana 3.7%, Brazil 3.9%, Russia 4.8%, United States 5.0%, Togo 5.1%. Low-fire areas such as Cyprus (14.8%) are flagged indicative only.</a:t>
+              <a:t>Errors: DR Congo 1.5%, India 1.8%, Nigeria 2.0%, Brazil 3.4%, Russia 3.5%, Ghana 3.7%, Australia 4.0%, Togo 5.0%, United States 6.8%. Low-fire areas such as Cyprus (14.4%) are flagged indicative only.</a:t>
             </a:r>
             <a:endParaRPr lang="en-US" dirty="0"/>
           </a:p>
@@ -860,7 +860,7 @@
           <a:p>
             <a:r>
               <a:rPr lang="en-US" dirty="0"/>
-              <a:t>Calendar of every month since 2000 with anomalies and seasons; early warning ranks this week against every year since 2001; any area by search, tap, draw or geolocation; installs on Android, iPhone and desktop and works offline.</a:t>
+              <a:t>Calendar of every month since 2000 with anomalies and seasons; early warning ranks this week against every year since 2001; any area by search, tap, draw or geolocation, or just the 55 km around any fire square, each square named after its nearest town; installs on Android, iPhone and desktop and works offline.</a:t>
             </a:r>
             <a:endParaRPr lang="en-US" dirty="0"/>
           </a:p>
@@ -948,7 +948,7 @@
           <a:p>
             <a:r>
               <a:rPr lang="en-US" dirty="0"/>
-              <a:t>Data: NASA FIRMS MODIS Collection 6.1 and VIIRS S-NPP 375 m archives for all 208 countries, and the VIIRS NRT feeds from LANCE. Python, DuckDB and Parquet pipeline; FastAPI server and a static site with an in-browser engine giving identical numbers; a self-renewing watcher keeps live fires current; 69 automated tests.</a:t>
+              <a:t>Data: NASA FIRMS MODIS Collection 6.1 and VIIRS S-NPP 375 m archives for all 208 countries, and the VIIRS NRT feeds from LANCE. Python, DuckDB and Parquet pipeline; FastAPI server and a static site with an in-browser engine giving identical numbers; a self-renewing watcher keeps live fires current; over 80 automated tests. Also uses Natural Earth borders and GeoNames place names.</a:t>
             </a:r>
             <a:endParaRPr lang="en-US" dirty="0"/>
           </a:p>
@@ -1579,7 +1579,7 @@
       </p:grpSpPr>
       <p:pic>
         <p:nvPicPr>
-          <p:cNvPr id="2" name="Image 0" descr="Validation: 208 countries; median out-of-sample annual error 1.6 to 5.1 percent in major fire regions; bar chart by country.">    </p:cNvPr>
+          <p:cNvPr id="2" name="Image 0" descr="Validation: 208 countries; median out-of-sample annual error 1.5 to 6.8 percent in major fire regions; bar chart by country.">    </p:cNvPr>
           <p:cNvPicPr>
             <a:picLocks noChangeAspect="1"/>
           </p:cNvPicPr>
@@ -1635,7 +1635,7 @@
       </p:grpSpPr>
       <p:pic>
         <p:nvPicPr>
-          <p:cNvPr id="2" name="Image 0" descr="The app: burning activity calendar, early warning card, and a phone showing a tap explanation.">    </p:cNvPr>
+          <p:cNvPr id="2" name="Image 0" descr="The app: burning activity calendar, early warning card, and a phone showing a tapped map square named after its nearest town, with Analyze this area.">    </p:cNvPr>
           <p:cNvPicPr>
             <a:picLocks noChangeAspect="1"/>
           </p:cNvPicPr>

--- a/submissions/FireCal-slides.pptx
+++ b/submissions/FireCal-slides.pptx
@@ -596,7 +596,7 @@
           <a:p>
             <a:r>
               <a:rPr lang="en-US" dirty="0"/>
-              <a:t>MODIS (1 km, 2000 onward) and VIIRS (375 m, 2012 onward) see the same fires differently; VIIRS records 1.9 to 4.1 times more fire cell-days depending on the region. Raw series jump at the switch, so trends, anomalies and seasons break across 2012. The harmonized record removes the jump.</a:t>
+              <a:t>MODIS (1 km, 2000 onward) and VIIRS (375 m, 2012 onward) see the same fires differently; VIIRS records 1.9 to 4.0 times more fire cell-days depending on the region. Raw series jump at the switch, so trends, anomalies and seasons break across 2012. The harmonized record removes the jump.</a:t>
             </a:r>
             <a:endParaRPr lang="en-US" dirty="0"/>
           </a:p>
@@ -684,7 +684,7 @@
           <a:p>
             <a:r>
               <a:rPr lang="en-US" dirty="0"/>
-              <a:t>Clean: vegetation fires, confidence filters, gas flares masked. Grid: 0.1 degree fire cell-days per sensor. Calibrate: monthly VIIRS/MODIS ratio per area on the 2012+ overlap, shrunk toward the area and worldwide ratios (k_world 2.665 from 208 countries, Lambda 50, lambda 20). Three eras: Terra-only and Terra+Aqua rescaled to VIIRS-equivalent, as are the few days the VIIRS satellite was out. Validate: leave-one-year-out cross-validation and a Terra-only vs Terra+Aqua check.</a:t>
+              <a:t>Clean: vegetation fires, confidence filters, gas flares masked. Grid: 0.1 degree fire cell-days per sensor. Calibrate: monthly VIIRS/MODIS ratio per area on the 2012+ overlap, shrunk toward the area and worldwide ratios (k_world 2.653 from 208 countries, Lambda 50, lambda 20). Three eras: Terra-only and Terra+Aqua rescaled to VIIRS-equivalent, as are the days a satellite was out (all of VIIRS, a lost VIIRS orbit, or part of MODIS). Validate: leave-one-year-out cross-validation and a Terra-only vs Terra+Aqua check.</a:t>
             </a:r>
             <a:endParaRPr lang="en-US" dirty="0"/>
           </a:p>
@@ -772,7 +772,7 @@
           <a:p>
             <a:r>
               <a:rPr lang="en-US" dirty="0"/>
-              <a:t>Errors: DR Congo 1.5%, India 1.8%, Nigeria 2.0%, Brazil 3.4%, Russia 3.5%, Ghana 3.7%, Australia 4.0%, Togo 5.0%, United States 6.8%. Low-fire areas such as Cyprus (14.4%) are flagged indicative only.</a:t>
+              <a:t>Errors: DR Congo 0.9%, Nigeria 1.9%, India 2.1%, Brazil 3.0%, Ghana 3.0%, Australia 3.3%, Russia 3.8%, Togo 5.2%, United States 7.2%. Low-fire areas such as Cyprus (13.9%) are flagged indicative only.</a:t>
             </a:r>
             <a:endParaRPr lang="en-US" dirty="0"/>
           </a:p>
@@ -1579,7 +1579,7 @@
       </p:grpSpPr>
       <p:pic>
         <p:nvPicPr>
-          <p:cNvPr id="2" name="Image 0" descr="Validation: 208 countries; median out-of-sample annual error 1.5 to 6.8 percent in major fire regions; bar chart by country.">    </p:cNvPr>
+          <p:cNvPr id="2" name="Image 0" descr="Validation: 208 countries; median out-of-sample annual error 0.9 to 7.2 percent in major fire regions; bar chart by country.">    </p:cNvPr>
           <p:cNvPicPr>
             <a:picLocks noChangeAspect="1"/>
           </p:cNvPicPr>
